--- a/blocks/E_autonomy_logic/Block_E_실습결과_명령어.pptx
+++ b/blocks/E_autonomy_logic/Block_E_실습결과_명령어.pptx
@@ -10,6 +10,7 @@
     <p:sldId id="258" r:id="rId9"/>
     <p:sldId id="259" r:id="rId10"/>
     <p:sldId id="260" r:id="rId11"/>
+    <p:sldId id="261" r:id="rId12"/>
   </p:sldIdLst>
   <p:sldSz cx="12191695" cy="6858000" type="screen4x3"/>
   <p:notesSz cx="6858000" cy="9144000"/>
@@ -4202,6 +4203,333 @@
               </a:defRPr>
             </a:pPr>
             <a:r>
+              <a:t>명령어 동작과 설정 포인트</a:t>
+            </a:r>
+          </a:p>
+        </p:txBody>
+      </p:sp>
+      <p:sp>
+        <p:nvSpPr>
+          <p:cNvPr id="5" name="TextBox 4"/>
+          <p:cNvSpPr txBox="1"/>
+          <p:nvPr/>
+        </p:nvSpPr>
+        <p:spPr>
+          <a:xfrm>
+            <a:off x="411480" y="6556248"/>
+            <a:ext cx="11247120" cy="164592"/>
+          </a:xfrm>
+          <a:prstGeom prst="rect">
+            <a:avLst/>
+          </a:prstGeom>
+          <a:noFill/>
+        </p:spPr>
+        <p:txBody>
+          <a:bodyPr wrap="square" anchor="t">
+            <a:spAutoFit/>
+          </a:bodyPr>
+          <a:lstStyle/>
+          <a:p>
+            <a:pPr>
+              <a:spcAft>
+                <a:spcPts val="500"/>
+              </a:spcAft>
+              <a:defRPr sz="1000" b="0">
+                <a:solidFill>
+                  <a:srgbClr val="667080"/>
+                </a:solidFill>
+                <a:latin typeface="Noto Sans CJK KR"/>
+              </a:defRPr>
+            </a:pPr>
+            <a:r>
+              <a:t>ROS 2 + Gazebo AGV 실습 · 모든 텍스트 최소 10pt</a:t>
+            </a:r>
+          </a:p>
+        </p:txBody>
+      </p:sp>
+      <p:sp>
+        <p:nvSpPr>
+          <p:cNvPr id="6" name="TextBox 5"/>
+          <p:cNvSpPr txBox="1"/>
+          <p:nvPr/>
+        </p:nvSpPr>
+        <p:spPr>
+          <a:xfrm>
+            <a:off x="594360" y="960120"/>
+            <a:ext cx="10972800" cy="411480"/>
+          </a:xfrm>
+          <a:prstGeom prst="rect">
+            <a:avLst/>
+          </a:prstGeom>
+          <a:noFill/>
+        </p:spPr>
+        <p:txBody>
+          <a:bodyPr wrap="square" anchor="t">
+            <a:spAutoFit/>
+          </a:bodyPr>
+          <a:lstStyle/>
+          <a:p>
+            <a:pPr>
+              <a:spcAft>
+                <a:spcPts val="500"/>
+              </a:spcAft>
+              <a:defRPr sz="2100" b="1">
+                <a:solidFill>
+                  <a:srgbClr val="173E6F"/>
+                </a:solidFill>
+                <a:latin typeface="Noto Sans CJK KR"/>
+              </a:defRPr>
+            </a:pPr>
+            <a:r>
+              <a:t>이 명령이 실제로 하는 일</a:t>
+            </a:r>
+          </a:p>
+        </p:txBody>
+      </p:sp>
+      <p:sp>
+        <p:nvSpPr>
+          <p:cNvPr id="7" name="TextBox 6"/>
+          <p:cNvSpPr txBox="1"/>
+          <p:nvPr/>
+        </p:nvSpPr>
+        <p:spPr>
+          <a:xfrm>
+            <a:off x="731520" y="1508760"/>
+            <a:ext cx="10698480" cy="4480560"/>
+          </a:xfrm>
+          <a:prstGeom prst="rect">
+            <a:avLst/>
+          </a:prstGeom>
+          <a:noFill/>
+        </p:spPr>
+        <p:txBody>
+          <a:bodyPr wrap="square" anchor="t">
+            <a:spAutoFit/>
+          </a:bodyPr>
+          <a:lstStyle/>
+          <a:p>
+            <a:pPr>
+              <a:spcAft>
+                <a:spcPts val="500"/>
+              </a:spcAft>
+              <a:defRPr sz="1500" b="0">
+                <a:solidFill>
+                  <a:srgbClr val="212B3D"/>
+                </a:solidFill>
+                <a:latin typeface="Noto Sans CJK KR"/>
+              </a:defRPr>
+            </a:pPr>
+            <a:r>
+              <a:t>• DetectionArray는 class·confidence·box 중심을 담고, yolo_node의 enable_yolo/model_path/threshold를 parameter로 조절한다.</a:t>
+            </a:r>
+          </a:p>
+          <a:p>
+            <a:pPr>
+              <a:spcAft>
+                <a:spcPts val="500"/>
+              </a:spcAft>
+              <a:defRPr sz="1500" b="0">
+                <a:solidFill>
+                  <a:srgbClr val="212B3D"/>
+                </a:solidFill>
+                <a:latin typeface="Noto Sans CJK KR"/>
+              </a:defRPr>
+            </a:pPr>
+            <a:r>
+              <a:t>• safety_controller는 /scan을 직접 검사해 stop_distance 안의 전진 명령을 zero Twist로 바꾼다.</a:t>
+            </a:r>
+          </a:p>
+          <a:p>
+            <a:pPr>
+              <a:spcAft>
+                <a:spcPts val="500"/>
+              </a:spcAft>
+              <a:defRPr sz="1500" b="0">
+                <a:solidFill>
+                  <a:srgbClr val="212B3D"/>
+                </a:solidFill>
+                <a:latin typeface="Noto Sans CJK KR"/>
+              </a:defRPr>
+            </a:pPr>
+            <a:r>
+              <a:t>• mission_manager는 10 Hz로 SEARCH·APPROACH·AVOID를 전환해 /cmd_vel_raw를 만든다.</a:t>
+            </a:r>
+          </a:p>
+        </p:txBody>
+      </p:sp>
+      <p:sp>
+        <p:nvSpPr>
+          <p:cNvPr id="8" name="TextBox 7"/>
+          <p:cNvSpPr txBox="1"/>
+          <p:nvPr/>
+        </p:nvSpPr>
+        <p:spPr>
+          <a:xfrm>
+            <a:off x="731520" y="5440680"/>
+            <a:ext cx="10698480" cy="502920"/>
+          </a:xfrm>
+          <a:prstGeom prst="rect">
+            <a:avLst/>
+          </a:prstGeom>
+          <a:noFill/>
+        </p:spPr>
+        <p:txBody>
+          <a:bodyPr wrap="square" anchor="t">
+            <a:spAutoFit/>
+          </a:bodyPr>
+          <a:lstStyle/>
+          <a:p>
+            <a:pPr>
+              <a:spcAft>
+                <a:spcPts val="500"/>
+              </a:spcAft>
+              <a:defRPr sz="1200" b="0">
+                <a:solidFill>
+                  <a:srgbClr val="3F5373"/>
+                </a:solidFill>
+                <a:latin typeface="Noto Sans CJK KR"/>
+              </a:defRPr>
+            </a:pPr>
+            <a:r>
+              <a:t>수치·토픽·방향을 바꿀 때는 해당 Block의 Mxx README에서 구현 파일과 기대 결과를 함께 확인합니다.</a:t>
+            </a:r>
+          </a:p>
+        </p:txBody>
+      </p:sp>
+    </p:spTree>
+  </p:cSld>
+  <p:clrMapOvr>
+    <a:masterClrMapping/>
+  </p:clrMapOvr>
+</p:sld>
+</file>
+
+<file path=ppt/slides/slide5.xml><?xml version="1.0" encoding="utf-8"?>
+<p:sld xmlns:a="http://schemas.openxmlformats.org/drawingml/2006/main" xmlns:p="http://schemas.openxmlformats.org/presentationml/2006/main" xmlns:r="http://schemas.openxmlformats.org/officeDocument/2006/relationships">
+  <p:cSld>
+    <p:spTree>
+      <p:nvGrpSpPr>
+        <p:cNvPr id="1" name=""/>
+        <p:cNvGrpSpPr/>
+        <p:nvPr/>
+      </p:nvGrpSpPr>
+      <p:grpSpPr/>
+      <p:sp>
+        <p:nvSpPr>
+          <p:cNvPr id="2" name="Rectangle 1"/>
+          <p:cNvSpPr/>
+          <p:nvPr/>
+        </p:nvSpPr>
+        <p:spPr>
+          <a:xfrm>
+            <a:off x="0" y="0"/>
+            <a:ext cx="12191695" cy="749808"/>
+          </a:xfrm>
+          <a:prstGeom prst="rect">
+            <a:avLst/>
+          </a:prstGeom>
+          <a:solidFill>
+            <a:srgbClr val="173E6F"/>
+          </a:solidFill>
+          <a:ln>
+            <a:noFill/>
+          </a:ln>
+        </p:spPr>
+        <p:style>
+          <a:lnRef idx="1">
+            <a:schemeClr val="accent1"/>
+          </a:lnRef>
+          <a:fillRef idx="3">
+            <a:schemeClr val="accent1"/>
+          </a:fillRef>
+          <a:effectRef idx="2">
+            <a:schemeClr val="accent1"/>
+          </a:effectRef>
+          <a:fontRef idx="minor">
+            <a:schemeClr val="lt1"/>
+          </a:fontRef>
+        </p:style>
+        <p:txBody>
+          <a:bodyPr rtlCol="0" anchor="ctr"/>
+          <a:lstStyle/>
+          <a:p>
+            <a:pPr algn="ctr"/>
+          </a:p>
+        </p:txBody>
+      </p:sp>
+      <p:sp>
+        <p:nvSpPr>
+          <p:cNvPr id="3" name="TextBox 2"/>
+          <p:cNvSpPr txBox="1"/>
+          <p:nvPr/>
+        </p:nvSpPr>
+        <p:spPr>
+          <a:xfrm>
+            <a:off x="411480" y="137160"/>
+            <a:ext cx="8046720" cy="320040"/>
+          </a:xfrm>
+          <a:prstGeom prst="rect">
+            <a:avLst/>
+          </a:prstGeom>
+          <a:noFill/>
+        </p:spPr>
+        <p:txBody>
+          <a:bodyPr wrap="square" anchor="t">
+            <a:spAutoFit/>
+          </a:bodyPr>
+          <a:lstStyle/>
+          <a:p>
+            <a:pPr>
+              <a:spcAft>
+                <a:spcPts val="500"/>
+              </a:spcAft>
+              <a:defRPr sz="2500" b="1">
+                <a:solidFill>
+                  <a:srgbClr val="FFFFFF"/>
+                </a:solidFill>
+                <a:latin typeface="Noto Sans CJK KR"/>
+              </a:defRPr>
+            </a:pPr>
+            <a:r>
+              <a:t>Block E — 제어·인지·미션</a:t>
+            </a:r>
+          </a:p>
+        </p:txBody>
+      </p:sp>
+      <p:sp>
+        <p:nvSpPr>
+          <p:cNvPr id="4" name="TextBox 3"/>
+          <p:cNvSpPr txBox="1"/>
+          <p:nvPr/>
+        </p:nvSpPr>
+        <p:spPr>
+          <a:xfrm>
+            <a:off x="8321040" y="182880"/>
+            <a:ext cx="3474720" cy="256032"/>
+          </a:xfrm>
+          <a:prstGeom prst="rect">
+            <a:avLst/>
+          </a:prstGeom>
+          <a:noFill/>
+        </p:spPr>
+        <p:txBody>
+          <a:bodyPr wrap="square" anchor="t">
+            <a:spAutoFit/>
+          </a:bodyPr>
+          <a:lstStyle/>
+          <a:p>
+            <a:pPr>
+              <a:spcAft>
+                <a:spcPts val="500"/>
+              </a:spcAft>
+              <a:defRPr sz="1000" b="0">
+                <a:solidFill>
+                  <a:srgbClr val="DCEAFC"/>
+                </a:solidFill>
+                <a:latin typeface="Noto Sans CJK KR"/>
+              </a:defRPr>
+            </a:pPr>
+            <a:r>
               <a:t>실제 실행 결과</a:t>
             </a:r>
           </a:p>
@@ -4278,7 +4606,7 @@
 </p:sld>
 </file>
 
-<file path=ppt/slides/slide5.xml><?xml version="1.0" encoding="utf-8"?>
+<file path=ppt/slides/slide6.xml><?xml version="1.0" encoding="utf-8"?>
 <p:sld xmlns:a="http://schemas.openxmlformats.org/drawingml/2006/main" xmlns:p="http://schemas.openxmlformats.org/presentationml/2006/main" xmlns:r="http://schemas.openxmlformats.org/officeDocument/2006/relationships">
   <p:cSld>
     <p:spTree>

--- a/blocks/E_autonomy_logic/Block_E_실습결과_명령어.pptx
+++ b/blocks/E_autonomy_logic/Block_E_실습결과_명령어.pptx
@@ -11,6 +11,7 @@
     <p:sldId id="259" r:id="rId10"/>
     <p:sldId id="260" r:id="rId11"/>
     <p:sldId id="261" r:id="rId12"/>
+    <p:sldId id="262" r:id="rId13"/>
   </p:sldIdLst>
   <p:sldSz cx="12191695" cy="6858000" type="screen4x3"/>
   <p:notesSz cx="6858000" cy="9144000"/>
@@ -3793,7 +3794,7 @@
               </a:defRPr>
             </a:pPr>
             <a:r>
-              <a:t>명령어 실행 순서</a:t>
+              <a:t>초심자 파일 제작 실습 1/1</a:t>
             </a:r>
           </a:p>
         </p:txBody>
@@ -3845,8 +3846,8 @@
         </p:nvSpPr>
         <p:spPr>
           <a:xfrm>
-            <a:off x="594360" y="932688"/>
-            <a:ext cx="10972800" cy="320040"/>
+            <a:off x="502920" y="841248"/>
+            <a:ext cx="11064240" cy="274320"/>
           </a:xfrm>
           <a:prstGeom prst="rect">
             <a:avLst/>
@@ -3863,7 +3864,7 @@
               <a:spcAft>
                 <a:spcPts val="500"/>
               </a:spcAft>
-              <a:defRPr sz="2100" b="1">
+              <a:defRPr sz="1900" b="1">
                 <a:solidFill>
                   <a:srgbClr val="173E6F"/>
                 </a:solidFill>
@@ -3871,21 +3872,99 @@
               </a:defRPr>
             </a:pPr>
             <a:r>
-              <a:t>권장 실행 순서</a:t>
-            </a:r>
-          </a:p>
-        </p:txBody>
-      </p:sp>
-      <p:sp>
-        <p:nvSpPr>
-          <p:cNvPr id="7" name="Rounded Rectangle 6"/>
+              <a:t>안전 필터 노드 만들기 (.py)</a:t>
+            </a:r>
+          </a:p>
+        </p:txBody>
+      </p:sp>
+      <p:sp>
+        <p:nvSpPr>
+          <p:cNvPr id="7" name="TextBox 6"/>
+          <p:cNvSpPr txBox="1"/>
+          <p:nvPr/>
+        </p:nvSpPr>
+        <p:spPr>
+          <a:xfrm>
+            <a:off x="530352" y="1161288"/>
+            <a:ext cx="10972800" cy="201168"/>
+          </a:xfrm>
+          <a:prstGeom prst="rect">
+            <a:avLst/>
+          </a:prstGeom>
+          <a:noFill/>
+        </p:spPr>
+        <p:txBody>
+          <a:bodyPr wrap="square" anchor="t">
+            <a:spAutoFit/>
+          </a:bodyPr>
+          <a:lstStyle/>
+          <a:p>
+            <a:pPr>
+              <a:spcAft>
+                <a:spcPts val="500"/>
+              </a:spcAft>
+              <a:defRPr sz="1100" b="0">
+                <a:solidFill>
+                  <a:srgbClr val="4C5B74"/>
+                </a:solidFill>
+                <a:latin typeface="Noto Sans CJK KR"/>
+              </a:defRPr>
+            </a:pPr>
+            <a:r>
+              <a:t>실제 파일: agv_ws/src/agv_control/agv_control/safety_controller.py</a:t>
+            </a:r>
+          </a:p>
+        </p:txBody>
+      </p:sp>
+      <p:sp>
+        <p:nvSpPr>
+          <p:cNvPr id="8" name="TextBox 7"/>
+          <p:cNvSpPr txBox="1"/>
+          <p:nvPr/>
+        </p:nvSpPr>
+        <p:spPr>
+          <a:xfrm>
+            <a:off x="530352" y="1362456"/>
+            <a:ext cx="10972800" cy="182880"/>
+          </a:xfrm>
+          <a:prstGeom prst="rect">
+            <a:avLst/>
+          </a:prstGeom>
+          <a:noFill/>
+        </p:spPr>
+        <p:txBody>
+          <a:bodyPr wrap="square" anchor="t">
+            <a:spAutoFit/>
+          </a:bodyPr>
+          <a:lstStyle/>
+          <a:p>
+            <a:pPr>
+              <a:spcAft>
+                <a:spcPts val="500"/>
+              </a:spcAft>
+              <a:defRPr sz="1000" b="0">
+                <a:solidFill>
+                  <a:srgbClr val="17638C"/>
+                </a:solidFill>
+                <a:latin typeface="Noto Sans CJK KR"/>
+              </a:defRPr>
+            </a:pPr>
+            <a:r>
+              <a:t>처음 만들 때: agv_control/agv_control/ 안에 safety_controller.py를 만들고 setup.py entry point를 추가</a:t>
+            </a:r>
+          </a:p>
+        </p:txBody>
+      </p:sp>
+      <p:sp>
+        <p:nvSpPr>
+          <p:cNvPr id="9" name="Rounded Rectangle 8"/>
           <p:cNvSpPr/>
           <p:nvPr/>
         </p:nvSpPr>
         <p:spPr>
           <a:xfrm>
-            <a:off x="594360" y="1417320"/>
-            <a:ext cx="10972800" cy="4526280"/>
+            <a:off x="502920" y="1627632"/>
+            <a:ext cx="5806440" cy="4416552"/>
           </a:xfrm>
           <a:prstGeom prst="roundRect">
             <a:avLst/>
@@ -3914,14 +3993,14 @@
           </a:fontRef>
         </p:style>
         <p:txBody>
-          <a:bodyPr rtlCol="0" anchor="ctr" lIns="237744" tIns="182880"/>
+          <a:bodyPr rtlCol="0" anchor="ctr" lIns="182880" tIns="137160"/>
           <a:lstStyle/>
           <a:p>
             <a:pPr algn="ctr">
               <a:spcAft>
-                <a:spcPts val="700"/>
-              </a:spcAft>
-              <a:defRPr sz="1100">
+                <a:spcPts val="300"/>
+              </a:spcAft>
+              <a:defRPr sz="1000">
                 <a:solidFill>
                   <a:srgbClr val="DFEDFF"/>
                 </a:solidFill>
@@ -3929,15 +4008,15 @@
               </a:defRPr>
             </a:pPr>
             <a:r>
-              <a:t>cd /home/lab4090/ros2_curri/agv_ws</a:t>
-            </a:r>
-          </a:p>
-          <a:p>
-            <a:pPr>
-              <a:spcAft>
-                <a:spcPts val="700"/>
-              </a:spcAft>
-              <a:defRPr sz="1100">
+              <a:t>if obstacle_distance &gt;= get_parameter('stop_distance').value</a:t>
+            </a:r>
+          </a:p>
+          <a:p>
+            <a:pPr>
+              <a:spcAft>
+                <a:spcPts val="300"/>
+              </a:spcAft>
+              <a:defRPr sz="1000">
                 <a:solidFill>
                   <a:srgbClr val="DFEDFF"/>
                 </a:solidFill>
@@ -3945,15 +4024,15 @@
               </a:defRPr>
             </a:pPr>
             <a:r>
-              <a:t>source install/setup.bash</a:t>
-            </a:r>
-          </a:p>
-          <a:p>
-            <a:pPr>
-              <a:spcAft>
-                <a:spcPts val="700"/>
-              </a:spcAft>
-              <a:defRPr sz="1100">
+              <a:t>   or command.linear.x &lt;= 0.0:</a:t>
+            </a:r>
+          </a:p>
+          <a:p>
+            <a:pPr>
+              <a:spcAft>
+                <a:spcPts val="300"/>
+              </a:spcAft>
+              <a:defRPr sz="1000">
                 <a:solidFill>
                   <a:srgbClr val="DFEDFF"/>
                 </a:solidFill>
@@ -3961,15 +4040,15 @@
               </a:defRPr>
             </a:pPr>
             <a:r>
-              <a:t>ros2 interface show agv_interfaces/msg/Detection</a:t>
-            </a:r>
-          </a:p>
-          <a:p>
-            <a:pPr>
-              <a:spcAft>
-                <a:spcPts val="700"/>
-              </a:spcAft>
-              <a:defRPr sz="1100">
+              <a:t>    safe = command</a:t>
+            </a:r>
+          </a:p>
+          <a:p>
+            <a:pPr>
+              <a:spcAft>
+                <a:spcPts val="300"/>
+              </a:spcAft>
+              <a:defRPr sz="1000">
                 <a:solidFill>
                   <a:srgbClr val="DFEDFF"/>
                 </a:solidFill>
@@ -3977,15 +4056,15 @@
               </a:defRPr>
             </a:pPr>
             <a:r>
-              <a:t>ros2 run agv_sensors lidar_processor</a:t>
-            </a:r>
-          </a:p>
-          <a:p>
-            <a:pPr>
-              <a:spcAft>
-                <a:spcPts val="700"/>
-              </a:spcAft>
-              <a:defRPr sz="1100">
+              <a:t>else:</a:t>
+            </a:r>
+          </a:p>
+          <a:p>
+            <a:pPr>
+              <a:spcAft>
+                <a:spcPts val="300"/>
+              </a:spcAft>
+              <a:defRPr sz="1000">
                 <a:solidFill>
                   <a:srgbClr val="DFEDFF"/>
                 </a:solidFill>
@@ -3993,15 +4072,15 @@
               </a:defRPr>
             </a:pPr>
             <a:r>
-              <a:t>ros2 run agv_control safety_controller --ros-args -p stop_distance:=0.5</a:t>
-            </a:r>
-          </a:p>
-          <a:p>
-            <a:pPr>
-              <a:spcAft>
-                <a:spcPts val="700"/>
-              </a:spcAft>
-              <a:defRPr sz="1100">
+              <a:t>    safe = Twist()  # 모든 속도 0</a:t>
+            </a:r>
+          </a:p>
+          <a:p>
+            <a:pPr>
+              <a:spcAft>
+                <a:spcPts val="300"/>
+              </a:spcAft>
+              <a:defRPr sz="1000">
                 <a:solidFill>
                   <a:srgbClr val="DFEDFF"/>
                 </a:solidFill>
@@ -4009,15 +4088,15 @@
               </a:defRPr>
             </a:pPr>
             <a:r>
-              <a:t>ros2 run agv_mission mission_manager</a:t>
-            </a:r>
-          </a:p>
-          <a:p>
-            <a:pPr>
-              <a:spcAft>
-                <a:spcPts val="700"/>
-              </a:spcAft>
-              <a:defRPr sz="1100">
+              <a:t>    logger.warn('stopping forward command')</a:t>
+            </a:r>
+          </a:p>
+          <a:p>
+            <a:pPr>
+              <a:spcAft>
+                <a:spcPts val="300"/>
+              </a:spcAft>
+              <a:defRPr sz="1000">
                 <a:solidFill>
                   <a:srgbClr val="DFEDFF"/>
                 </a:solidFill>
@@ -4025,21 +4104,21 @@
               </a:defRPr>
             </a:pPr>
             <a:r>
-              <a:t>ros2 topic echo /mission_state</a:t>
-            </a:r>
-          </a:p>
-        </p:txBody>
-      </p:sp>
-      <p:sp>
-        <p:nvSpPr>
-          <p:cNvPr id="8" name="TextBox 7"/>
+              <a:t>publisher.publish(safe)  # /cmd_vel</a:t>
+            </a:r>
+          </a:p>
+        </p:txBody>
+      </p:sp>
+      <p:sp>
+        <p:nvSpPr>
+          <p:cNvPr id="10" name="TextBox 9"/>
           <p:cNvSpPr txBox="1"/>
           <p:nvPr/>
         </p:nvSpPr>
         <p:spPr>
           <a:xfrm>
-            <a:off x="685800" y="6089904"/>
-            <a:ext cx="10789920" cy="256032"/>
+            <a:off x="6537960" y="1627632"/>
+            <a:ext cx="4892040" cy="320040"/>
           </a:xfrm>
           <a:prstGeom prst="rect">
             <a:avLst/>
@@ -4056,15 +4135,164 @@
               <a:spcAft>
                 <a:spcPts val="500"/>
               </a:spcAft>
-              <a:defRPr sz="1000" b="0">
-                <a:solidFill>
-                  <a:srgbClr val="505C70"/>
-                </a:solidFill>
-                <a:latin typeface="Noto Sans CJK KR"/>
-              </a:defRPr>
-            </a:pPr>
-            <a:r>
-              <a:t>명령은 Block README의 순서와 동일합니다. 새 터미널에서도 ROS와 workspace를 source해야 합니다.</a:t>
+              <a:defRPr sz="1600" b="1">
+                <a:solidFill>
+                  <a:srgbClr val="173E6F"/>
+                </a:solidFill>
+                <a:latin typeface="Noto Sans CJK KR"/>
+              </a:defRPr>
+            </a:pPr>
+            <a:r>
+              <a:t>만드는 순서</a:t>
+            </a:r>
+          </a:p>
+        </p:txBody>
+      </p:sp>
+      <p:sp>
+        <p:nvSpPr>
+          <p:cNvPr id="11" name="TextBox 10"/>
+          <p:cNvSpPr txBox="1"/>
+          <p:nvPr/>
+        </p:nvSpPr>
+        <p:spPr>
+          <a:xfrm>
+            <a:off x="6565392" y="1975104"/>
+            <a:ext cx="4800600" cy="2258568"/>
+          </a:xfrm>
+          <a:prstGeom prst="rect">
+            <a:avLst/>
+          </a:prstGeom>
+          <a:noFill/>
+        </p:spPr>
+        <p:txBody>
+          <a:bodyPr wrap="square" anchor="t">
+            <a:spAutoFit/>
+          </a:bodyPr>
+          <a:lstStyle/>
+          <a:p>
+            <a:pPr>
+              <a:spcAft>
+                <a:spcPts val="500"/>
+              </a:spcAft>
+              <a:defRPr sz="1200" b="0">
+                <a:solidFill>
+                  <a:srgbClr val="212B3D"/>
+                </a:solidFill>
+                <a:latin typeface="Noto Sans CJK KR"/>
+              </a:defRPr>
+            </a:pPr>
+            <a:r>
+              <a:t>• 1. /scan과 /cmd_vel_raw를 구독하고 /cmd_vel publisher를 만듭니다.</a:t>
+            </a:r>
+          </a:p>
+          <a:p>
+            <a:pPr>
+              <a:spcAft>
+                <a:spcPts val="500"/>
+              </a:spcAft>
+              <a:defRPr sz="1200" b="0">
+                <a:solidFill>
+                  <a:srgbClr val="212B3D"/>
+                </a:solidFill>
+                <a:latin typeface="Noto Sans CJK KR"/>
+              </a:defRPr>
+            </a:pPr>
+            <a:r>
+              <a:t>• 2. stop_distance와 front_half_angle_deg를 parameter로 선언합니다.</a:t>
+            </a:r>
+          </a:p>
+          <a:p>
+            <a:pPr>
+              <a:spcAft>
+                <a:spcPts val="500"/>
+              </a:spcAft>
+              <a:defRPr sz="1200" b="0">
+                <a:solidFill>
+                  <a:srgbClr val="212B3D"/>
+                </a:solidFill>
+                <a:latin typeface="Noto Sans CJK KR"/>
+              </a:defRPr>
+            </a:pPr>
+            <a:r>
+              <a:t>• 3. 장애물이 가까운 전진 명령만 zero Twist로 바꿔 Gazebo에 전달합니다.</a:t>
+            </a:r>
+          </a:p>
+        </p:txBody>
+      </p:sp>
+      <p:sp>
+        <p:nvSpPr>
+          <p:cNvPr id="12" name="TextBox 11"/>
+          <p:cNvSpPr txBox="1"/>
+          <p:nvPr/>
+        </p:nvSpPr>
+        <p:spPr>
+          <a:xfrm>
+            <a:off x="6565392" y="4480560"/>
+            <a:ext cx="4800600" cy="320040"/>
+          </a:xfrm>
+          <a:prstGeom prst="rect">
+            <a:avLst/>
+          </a:prstGeom>
+          <a:noFill/>
+        </p:spPr>
+        <p:txBody>
+          <a:bodyPr wrap="square" anchor="t">
+            <a:spAutoFit/>
+          </a:bodyPr>
+          <a:lstStyle/>
+          <a:p>
+            <a:pPr>
+              <a:spcAft>
+                <a:spcPts val="500"/>
+              </a:spcAft>
+              <a:defRPr sz="1600" b="1">
+                <a:solidFill>
+                  <a:srgbClr val="173E6F"/>
+                </a:solidFill>
+                <a:latin typeface="Noto Sans CJK KR"/>
+              </a:defRPr>
+            </a:pPr>
+            <a:r>
+              <a:t>실행하면 이렇게 됩니다</a:t>
+            </a:r>
+          </a:p>
+        </p:txBody>
+      </p:sp>
+      <p:sp>
+        <p:nvSpPr>
+          <p:cNvPr id="13" name="TextBox 12"/>
+          <p:cNvSpPr txBox="1"/>
+          <p:nvPr/>
+        </p:nvSpPr>
+        <p:spPr>
+          <a:xfrm>
+            <a:off x="6565392" y="4892040"/>
+            <a:ext cx="4800600" cy="822960"/>
+          </a:xfrm>
+          <a:prstGeom prst="rect">
+            <a:avLst/>
+          </a:prstGeom>
+          <a:noFill/>
+        </p:spPr>
+        <p:txBody>
+          <a:bodyPr wrap="square" anchor="t">
+            <a:spAutoFit/>
+          </a:bodyPr>
+          <a:lstStyle/>
+          <a:p>
+            <a:pPr>
+              <a:spcAft>
+                <a:spcPts val="500"/>
+              </a:spcAft>
+              <a:defRPr sz="1200" b="0">
+                <a:solidFill>
+                  <a:srgbClr val="212B3D"/>
+                </a:solidFill>
+                <a:latin typeface="Noto Sans CJK KR"/>
+              </a:defRPr>
+            </a:pPr>
+            <a:r>
+              <a:t>미션이 전진을 요청해도 LiDAR 전방 0.5 m 안에 물체가 있으면 /cmd_vel은 0이 됩니다.</a:t>
             </a:r>
           </a:p>
         </p:txBody>
@@ -4203,7 +4431,7 @@
               </a:defRPr>
             </a:pPr>
             <a:r>
-              <a:t>명령어 동작과 설정 포인트</a:t>
+              <a:t>명령어 실행 순서</a:t>
             </a:r>
           </a:p>
         </p:txBody>
@@ -4255,8 +4483,8 @@
         </p:nvSpPr>
         <p:spPr>
           <a:xfrm>
-            <a:off x="594360" y="960120"/>
-            <a:ext cx="10972800" cy="411480"/>
+            <a:off x="594360" y="932688"/>
+            <a:ext cx="10972800" cy="320040"/>
           </a:xfrm>
           <a:prstGeom prst="rect">
             <a:avLst/>
@@ -4281,21 +4509,175 @@
               </a:defRPr>
             </a:pPr>
             <a:r>
-              <a:t>이 명령이 실제로 하는 일</a:t>
-            </a:r>
-          </a:p>
-        </p:txBody>
-      </p:sp>
-      <p:sp>
-        <p:nvSpPr>
-          <p:cNvPr id="7" name="TextBox 6"/>
+              <a:t>권장 실행 순서</a:t>
+            </a:r>
+          </a:p>
+        </p:txBody>
+      </p:sp>
+      <p:sp>
+        <p:nvSpPr>
+          <p:cNvPr id="7" name="Rounded Rectangle 6"/>
+          <p:cNvSpPr/>
+          <p:nvPr/>
+        </p:nvSpPr>
+        <p:spPr>
+          <a:xfrm>
+            <a:off x="594360" y="1417320"/>
+            <a:ext cx="10972800" cy="4526280"/>
+          </a:xfrm>
+          <a:prstGeom prst="roundRect">
+            <a:avLst/>
+          </a:prstGeom>
+          <a:solidFill>
+            <a:srgbClr val="141C2A"/>
+          </a:solidFill>
+          <a:ln>
+            <a:solidFill>
+              <a:srgbClr val="40506E"/>
+            </a:solidFill>
+          </a:ln>
+        </p:spPr>
+        <p:style>
+          <a:lnRef idx="1">
+            <a:schemeClr val="accent1"/>
+          </a:lnRef>
+          <a:fillRef idx="3">
+            <a:schemeClr val="accent1"/>
+          </a:fillRef>
+          <a:effectRef idx="2">
+            <a:schemeClr val="accent1"/>
+          </a:effectRef>
+          <a:fontRef idx="minor">
+            <a:schemeClr val="lt1"/>
+          </a:fontRef>
+        </p:style>
+        <p:txBody>
+          <a:bodyPr rtlCol="0" anchor="ctr" lIns="237744" tIns="182880"/>
+          <a:lstStyle/>
+          <a:p>
+            <a:pPr algn="ctr">
+              <a:spcAft>
+                <a:spcPts val="700"/>
+              </a:spcAft>
+              <a:defRPr sz="1100">
+                <a:solidFill>
+                  <a:srgbClr val="DFEDFF"/>
+                </a:solidFill>
+                <a:latin typeface="Noto Sans CJK KR"/>
+              </a:defRPr>
+            </a:pPr>
+            <a:r>
+              <a:t>cd /home/lab4090/ros2_curri/agv_ws</a:t>
+            </a:r>
+          </a:p>
+          <a:p>
+            <a:pPr>
+              <a:spcAft>
+                <a:spcPts val="700"/>
+              </a:spcAft>
+              <a:defRPr sz="1100">
+                <a:solidFill>
+                  <a:srgbClr val="DFEDFF"/>
+                </a:solidFill>
+                <a:latin typeface="Noto Sans CJK KR"/>
+              </a:defRPr>
+            </a:pPr>
+            <a:r>
+              <a:t>source install/setup.bash</a:t>
+            </a:r>
+          </a:p>
+          <a:p>
+            <a:pPr>
+              <a:spcAft>
+                <a:spcPts val="700"/>
+              </a:spcAft>
+              <a:defRPr sz="1100">
+                <a:solidFill>
+                  <a:srgbClr val="DFEDFF"/>
+                </a:solidFill>
+                <a:latin typeface="Noto Sans CJK KR"/>
+              </a:defRPr>
+            </a:pPr>
+            <a:r>
+              <a:t>ros2 interface show agv_interfaces/msg/Detection</a:t>
+            </a:r>
+          </a:p>
+          <a:p>
+            <a:pPr>
+              <a:spcAft>
+                <a:spcPts val="700"/>
+              </a:spcAft>
+              <a:defRPr sz="1100">
+                <a:solidFill>
+                  <a:srgbClr val="DFEDFF"/>
+                </a:solidFill>
+                <a:latin typeface="Noto Sans CJK KR"/>
+              </a:defRPr>
+            </a:pPr>
+            <a:r>
+              <a:t>ros2 run agv_sensors lidar_processor</a:t>
+            </a:r>
+          </a:p>
+          <a:p>
+            <a:pPr>
+              <a:spcAft>
+                <a:spcPts val="700"/>
+              </a:spcAft>
+              <a:defRPr sz="1100">
+                <a:solidFill>
+                  <a:srgbClr val="DFEDFF"/>
+                </a:solidFill>
+                <a:latin typeface="Noto Sans CJK KR"/>
+              </a:defRPr>
+            </a:pPr>
+            <a:r>
+              <a:t>ros2 run agv_control safety_controller --ros-args -p stop_distance:=0.5</a:t>
+            </a:r>
+          </a:p>
+          <a:p>
+            <a:pPr>
+              <a:spcAft>
+                <a:spcPts val="700"/>
+              </a:spcAft>
+              <a:defRPr sz="1100">
+                <a:solidFill>
+                  <a:srgbClr val="DFEDFF"/>
+                </a:solidFill>
+                <a:latin typeface="Noto Sans CJK KR"/>
+              </a:defRPr>
+            </a:pPr>
+            <a:r>
+              <a:t>ros2 run agv_mission mission_manager</a:t>
+            </a:r>
+          </a:p>
+          <a:p>
+            <a:pPr>
+              <a:spcAft>
+                <a:spcPts val="700"/>
+              </a:spcAft>
+              <a:defRPr sz="1100">
+                <a:solidFill>
+                  <a:srgbClr val="DFEDFF"/>
+                </a:solidFill>
+                <a:latin typeface="Noto Sans CJK KR"/>
+              </a:defRPr>
+            </a:pPr>
+            <a:r>
+              <a:t>ros2 topic echo /mission_state</a:t>
+            </a:r>
+          </a:p>
+        </p:txBody>
+      </p:sp>
+      <p:sp>
+        <p:nvSpPr>
+          <p:cNvPr id="8" name="TextBox 7"/>
           <p:cNvSpPr txBox="1"/>
           <p:nvPr/>
         </p:nvSpPr>
         <p:spPr>
           <a:xfrm>
-            <a:off x="731520" y="1508760"/>
-            <a:ext cx="10698480" cy="4480560"/>
+            <a:off x="685800" y="6089904"/>
+            <a:ext cx="10789920" cy="256032"/>
           </a:xfrm>
           <a:prstGeom prst="rect">
             <a:avLst/>
@@ -4312,86 +4694,15 @@
               <a:spcAft>
                 <a:spcPts val="500"/>
               </a:spcAft>
-              <a:defRPr sz="1500" b="0">
-                <a:solidFill>
-                  <a:srgbClr val="212B3D"/>
-                </a:solidFill>
-                <a:latin typeface="Noto Sans CJK KR"/>
-              </a:defRPr>
-            </a:pPr>
-            <a:r>
-              <a:t>• DetectionArray는 class·confidence·box 중심을 담고, yolo_node의 enable_yolo/model_path/threshold를 parameter로 조절한다.</a:t>
-            </a:r>
-          </a:p>
-          <a:p>
-            <a:pPr>
-              <a:spcAft>
-                <a:spcPts val="500"/>
-              </a:spcAft>
-              <a:defRPr sz="1500" b="0">
-                <a:solidFill>
-                  <a:srgbClr val="212B3D"/>
-                </a:solidFill>
-                <a:latin typeface="Noto Sans CJK KR"/>
-              </a:defRPr>
-            </a:pPr>
-            <a:r>
-              <a:t>• safety_controller는 /scan을 직접 검사해 stop_distance 안의 전진 명령을 zero Twist로 바꾼다.</a:t>
-            </a:r>
-          </a:p>
-          <a:p>
-            <a:pPr>
-              <a:spcAft>
-                <a:spcPts val="500"/>
-              </a:spcAft>
-              <a:defRPr sz="1500" b="0">
-                <a:solidFill>
-                  <a:srgbClr val="212B3D"/>
-                </a:solidFill>
-                <a:latin typeface="Noto Sans CJK KR"/>
-              </a:defRPr>
-            </a:pPr>
-            <a:r>
-              <a:t>• mission_manager는 10 Hz로 SEARCH·APPROACH·AVOID를 전환해 /cmd_vel_raw를 만든다.</a:t>
-            </a:r>
-          </a:p>
-        </p:txBody>
-      </p:sp>
-      <p:sp>
-        <p:nvSpPr>
-          <p:cNvPr id="8" name="TextBox 7"/>
-          <p:cNvSpPr txBox="1"/>
-          <p:nvPr/>
-        </p:nvSpPr>
-        <p:spPr>
-          <a:xfrm>
-            <a:off x="731520" y="5440680"/>
-            <a:ext cx="10698480" cy="502920"/>
-          </a:xfrm>
-          <a:prstGeom prst="rect">
-            <a:avLst/>
-          </a:prstGeom>
-          <a:noFill/>
-        </p:spPr>
-        <p:txBody>
-          <a:bodyPr wrap="square" anchor="t">
-            <a:spAutoFit/>
-          </a:bodyPr>
-          <a:lstStyle/>
-          <a:p>
-            <a:pPr>
-              <a:spcAft>
-                <a:spcPts val="500"/>
-              </a:spcAft>
-              <a:defRPr sz="1200" b="0">
-                <a:solidFill>
-                  <a:srgbClr val="3F5373"/>
-                </a:solidFill>
-                <a:latin typeface="Noto Sans CJK KR"/>
-              </a:defRPr>
-            </a:pPr>
-            <a:r>
-              <a:t>수치·토픽·방향을 바꿀 때는 해당 Block의 Mxx README에서 구현 파일과 기대 결과를 함께 확인합니다.</a:t>
+              <a:defRPr sz="1000" b="0">
+                <a:solidFill>
+                  <a:srgbClr val="505C70"/>
+                </a:solidFill>
+                <a:latin typeface="Noto Sans CJK KR"/>
+              </a:defRPr>
+            </a:pPr>
+            <a:r>
+              <a:t>명령은 Block README의 순서와 동일합니다. 새 터미널에서도 ROS와 workspace를 source해야 합니다.</a:t>
             </a:r>
           </a:p>
         </p:txBody>
@@ -4530,6 +4841,333 @@
               </a:defRPr>
             </a:pPr>
             <a:r>
+              <a:t>명령어 동작과 설정 포인트</a:t>
+            </a:r>
+          </a:p>
+        </p:txBody>
+      </p:sp>
+      <p:sp>
+        <p:nvSpPr>
+          <p:cNvPr id="5" name="TextBox 4"/>
+          <p:cNvSpPr txBox="1"/>
+          <p:nvPr/>
+        </p:nvSpPr>
+        <p:spPr>
+          <a:xfrm>
+            <a:off x="411480" y="6556248"/>
+            <a:ext cx="11247120" cy="164592"/>
+          </a:xfrm>
+          <a:prstGeom prst="rect">
+            <a:avLst/>
+          </a:prstGeom>
+          <a:noFill/>
+        </p:spPr>
+        <p:txBody>
+          <a:bodyPr wrap="square" anchor="t">
+            <a:spAutoFit/>
+          </a:bodyPr>
+          <a:lstStyle/>
+          <a:p>
+            <a:pPr>
+              <a:spcAft>
+                <a:spcPts val="500"/>
+              </a:spcAft>
+              <a:defRPr sz="1000" b="0">
+                <a:solidFill>
+                  <a:srgbClr val="667080"/>
+                </a:solidFill>
+                <a:latin typeface="Noto Sans CJK KR"/>
+              </a:defRPr>
+            </a:pPr>
+            <a:r>
+              <a:t>ROS 2 + Gazebo AGV 실습 · 모든 텍스트 최소 10pt</a:t>
+            </a:r>
+          </a:p>
+        </p:txBody>
+      </p:sp>
+      <p:sp>
+        <p:nvSpPr>
+          <p:cNvPr id="6" name="TextBox 5"/>
+          <p:cNvSpPr txBox="1"/>
+          <p:nvPr/>
+        </p:nvSpPr>
+        <p:spPr>
+          <a:xfrm>
+            <a:off x="594360" y="960120"/>
+            <a:ext cx="10972800" cy="411480"/>
+          </a:xfrm>
+          <a:prstGeom prst="rect">
+            <a:avLst/>
+          </a:prstGeom>
+          <a:noFill/>
+        </p:spPr>
+        <p:txBody>
+          <a:bodyPr wrap="square" anchor="t">
+            <a:spAutoFit/>
+          </a:bodyPr>
+          <a:lstStyle/>
+          <a:p>
+            <a:pPr>
+              <a:spcAft>
+                <a:spcPts val="500"/>
+              </a:spcAft>
+              <a:defRPr sz="2100" b="1">
+                <a:solidFill>
+                  <a:srgbClr val="173E6F"/>
+                </a:solidFill>
+                <a:latin typeface="Noto Sans CJK KR"/>
+              </a:defRPr>
+            </a:pPr>
+            <a:r>
+              <a:t>이 명령이 실제로 하는 일</a:t>
+            </a:r>
+          </a:p>
+        </p:txBody>
+      </p:sp>
+      <p:sp>
+        <p:nvSpPr>
+          <p:cNvPr id="7" name="TextBox 6"/>
+          <p:cNvSpPr txBox="1"/>
+          <p:nvPr/>
+        </p:nvSpPr>
+        <p:spPr>
+          <a:xfrm>
+            <a:off x="731520" y="1508760"/>
+            <a:ext cx="10698480" cy="4480560"/>
+          </a:xfrm>
+          <a:prstGeom prst="rect">
+            <a:avLst/>
+          </a:prstGeom>
+          <a:noFill/>
+        </p:spPr>
+        <p:txBody>
+          <a:bodyPr wrap="square" anchor="t">
+            <a:spAutoFit/>
+          </a:bodyPr>
+          <a:lstStyle/>
+          <a:p>
+            <a:pPr>
+              <a:spcAft>
+                <a:spcPts val="500"/>
+              </a:spcAft>
+              <a:defRPr sz="1500" b="0">
+                <a:solidFill>
+                  <a:srgbClr val="212B3D"/>
+                </a:solidFill>
+                <a:latin typeface="Noto Sans CJK KR"/>
+              </a:defRPr>
+            </a:pPr>
+            <a:r>
+              <a:t>• DetectionArray는 class·confidence·box 중심을 담고, yolo_node의 enable_yolo/model_path/threshold를 parameter로 조절한다.</a:t>
+            </a:r>
+          </a:p>
+          <a:p>
+            <a:pPr>
+              <a:spcAft>
+                <a:spcPts val="500"/>
+              </a:spcAft>
+              <a:defRPr sz="1500" b="0">
+                <a:solidFill>
+                  <a:srgbClr val="212B3D"/>
+                </a:solidFill>
+                <a:latin typeface="Noto Sans CJK KR"/>
+              </a:defRPr>
+            </a:pPr>
+            <a:r>
+              <a:t>• safety_controller는 /scan을 직접 검사해 stop_distance 안의 전진 명령을 zero Twist로 바꾼다.</a:t>
+            </a:r>
+          </a:p>
+          <a:p>
+            <a:pPr>
+              <a:spcAft>
+                <a:spcPts val="500"/>
+              </a:spcAft>
+              <a:defRPr sz="1500" b="0">
+                <a:solidFill>
+                  <a:srgbClr val="212B3D"/>
+                </a:solidFill>
+                <a:latin typeface="Noto Sans CJK KR"/>
+              </a:defRPr>
+            </a:pPr>
+            <a:r>
+              <a:t>• mission_manager는 10 Hz로 SEARCH·APPROACH·AVOID를 전환해 /cmd_vel_raw를 만든다.</a:t>
+            </a:r>
+          </a:p>
+        </p:txBody>
+      </p:sp>
+      <p:sp>
+        <p:nvSpPr>
+          <p:cNvPr id="8" name="TextBox 7"/>
+          <p:cNvSpPr txBox="1"/>
+          <p:nvPr/>
+        </p:nvSpPr>
+        <p:spPr>
+          <a:xfrm>
+            <a:off x="731520" y="5440680"/>
+            <a:ext cx="10698480" cy="502920"/>
+          </a:xfrm>
+          <a:prstGeom prst="rect">
+            <a:avLst/>
+          </a:prstGeom>
+          <a:noFill/>
+        </p:spPr>
+        <p:txBody>
+          <a:bodyPr wrap="square" anchor="t">
+            <a:spAutoFit/>
+          </a:bodyPr>
+          <a:lstStyle/>
+          <a:p>
+            <a:pPr>
+              <a:spcAft>
+                <a:spcPts val="500"/>
+              </a:spcAft>
+              <a:defRPr sz="1200" b="0">
+                <a:solidFill>
+                  <a:srgbClr val="3F5373"/>
+                </a:solidFill>
+                <a:latin typeface="Noto Sans CJK KR"/>
+              </a:defRPr>
+            </a:pPr>
+            <a:r>
+              <a:t>수치·토픽·방향을 바꿀 때는 해당 Block의 Mxx README에서 구현 파일과 기대 결과를 함께 확인합니다.</a:t>
+            </a:r>
+          </a:p>
+        </p:txBody>
+      </p:sp>
+    </p:spTree>
+  </p:cSld>
+  <p:clrMapOvr>
+    <a:masterClrMapping/>
+  </p:clrMapOvr>
+</p:sld>
+</file>
+
+<file path=ppt/slides/slide6.xml><?xml version="1.0" encoding="utf-8"?>
+<p:sld xmlns:a="http://schemas.openxmlformats.org/drawingml/2006/main" xmlns:p="http://schemas.openxmlformats.org/presentationml/2006/main" xmlns:r="http://schemas.openxmlformats.org/officeDocument/2006/relationships">
+  <p:cSld>
+    <p:spTree>
+      <p:nvGrpSpPr>
+        <p:cNvPr id="1" name=""/>
+        <p:cNvGrpSpPr/>
+        <p:nvPr/>
+      </p:nvGrpSpPr>
+      <p:grpSpPr/>
+      <p:sp>
+        <p:nvSpPr>
+          <p:cNvPr id="2" name="Rectangle 1"/>
+          <p:cNvSpPr/>
+          <p:nvPr/>
+        </p:nvSpPr>
+        <p:spPr>
+          <a:xfrm>
+            <a:off x="0" y="0"/>
+            <a:ext cx="12191695" cy="749808"/>
+          </a:xfrm>
+          <a:prstGeom prst="rect">
+            <a:avLst/>
+          </a:prstGeom>
+          <a:solidFill>
+            <a:srgbClr val="173E6F"/>
+          </a:solidFill>
+          <a:ln>
+            <a:noFill/>
+          </a:ln>
+        </p:spPr>
+        <p:style>
+          <a:lnRef idx="1">
+            <a:schemeClr val="accent1"/>
+          </a:lnRef>
+          <a:fillRef idx="3">
+            <a:schemeClr val="accent1"/>
+          </a:fillRef>
+          <a:effectRef idx="2">
+            <a:schemeClr val="accent1"/>
+          </a:effectRef>
+          <a:fontRef idx="minor">
+            <a:schemeClr val="lt1"/>
+          </a:fontRef>
+        </p:style>
+        <p:txBody>
+          <a:bodyPr rtlCol="0" anchor="ctr"/>
+          <a:lstStyle/>
+          <a:p>
+            <a:pPr algn="ctr"/>
+          </a:p>
+        </p:txBody>
+      </p:sp>
+      <p:sp>
+        <p:nvSpPr>
+          <p:cNvPr id="3" name="TextBox 2"/>
+          <p:cNvSpPr txBox="1"/>
+          <p:nvPr/>
+        </p:nvSpPr>
+        <p:spPr>
+          <a:xfrm>
+            <a:off x="411480" y="137160"/>
+            <a:ext cx="8046720" cy="320040"/>
+          </a:xfrm>
+          <a:prstGeom prst="rect">
+            <a:avLst/>
+          </a:prstGeom>
+          <a:noFill/>
+        </p:spPr>
+        <p:txBody>
+          <a:bodyPr wrap="square" anchor="t">
+            <a:spAutoFit/>
+          </a:bodyPr>
+          <a:lstStyle/>
+          <a:p>
+            <a:pPr>
+              <a:spcAft>
+                <a:spcPts val="500"/>
+              </a:spcAft>
+              <a:defRPr sz="2500" b="1">
+                <a:solidFill>
+                  <a:srgbClr val="FFFFFF"/>
+                </a:solidFill>
+                <a:latin typeface="Noto Sans CJK KR"/>
+              </a:defRPr>
+            </a:pPr>
+            <a:r>
+              <a:t>Block E — 제어·인지·미션</a:t>
+            </a:r>
+          </a:p>
+        </p:txBody>
+      </p:sp>
+      <p:sp>
+        <p:nvSpPr>
+          <p:cNvPr id="4" name="TextBox 3"/>
+          <p:cNvSpPr txBox="1"/>
+          <p:nvPr/>
+        </p:nvSpPr>
+        <p:spPr>
+          <a:xfrm>
+            <a:off x="8321040" y="182880"/>
+            <a:ext cx="3474720" cy="256032"/>
+          </a:xfrm>
+          <a:prstGeom prst="rect">
+            <a:avLst/>
+          </a:prstGeom>
+          <a:noFill/>
+        </p:spPr>
+        <p:txBody>
+          <a:bodyPr wrap="square" anchor="t">
+            <a:spAutoFit/>
+          </a:bodyPr>
+          <a:lstStyle/>
+          <a:p>
+            <a:pPr>
+              <a:spcAft>
+                <a:spcPts val="500"/>
+              </a:spcAft>
+              <a:defRPr sz="1000" b="0">
+                <a:solidFill>
+                  <a:srgbClr val="DCEAFC"/>
+                </a:solidFill>
+                <a:latin typeface="Noto Sans CJK KR"/>
+              </a:defRPr>
+            </a:pPr>
+            <a:r>
               <a:t>실제 실행 결과</a:t>
             </a:r>
           </a:p>
@@ -4606,7 +5244,7 @@
 </p:sld>
 </file>
 
-<file path=ppt/slides/slide6.xml><?xml version="1.0" encoding="utf-8"?>
+<file path=ppt/slides/slide7.xml><?xml version="1.0" encoding="utf-8"?>
 <p:sld xmlns:a="http://schemas.openxmlformats.org/drawingml/2006/main" xmlns:p="http://schemas.openxmlformats.org/presentationml/2006/main" xmlns:r="http://schemas.openxmlformats.org/officeDocument/2006/relationships">
   <p:cSld>
     <p:spTree>
